--- a/slides/006_colors_and_maps.pptx
+++ b/slides/006_colors_and_maps.pptx
@@ -346,7 +346,7 @@
           <a:p>
             <a:fld id="{F238F5BA-0AAF-5142-B69C-F1241056CF61}" type="datetimeFigureOut">
               <a:rPr lang="en-US" smtClean="0"/>
-              <a:t>9/21/26</a:t>
+              <a:t>9/23/26</a:t>
             </a:fld>
             <a:endParaRPr lang="en-US"/>
           </a:p>
@@ -557,7 +557,7 @@
           <a:p>
             <a:fld id="{F238F5BA-0AAF-5142-B69C-F1241056CF61}" type="datetimeFigureOut">
               <a:rPr lang="en-US" smtClean="0"/>
-              <a:t>9/21/26</a:t>
+              <a:t>9/23/26</a:t>
             </a:fld>
             <a:endParaRPr lang="en-US"/>
           </a:p>
@@ -772,7 +772,7 @@
           <a:p>
             <a:fld id="{F238F5BA-0AAF-5142-B69C-F1241056CF61}" type="datetimeFigureOut">
               <a:rPr lang="en-US" smtClean="0"/>
-              <a:t>9/21/26</a:t>
+              <a:t>9/23/26</a:t>
             </a:fld>
             <a:endParaRPr lang="en-US"/>
           </a:p>
@@ -973,7 +973,7 @@
           <a:p>
             <a:fld id="{F238F5BA-0AAF-5142-B69C-F1241056CF61}" type="datetimeFigureOut">
               <a:rPr lang="en-US" smtClean="0"/>
-              <a:t>9/21/26</a:t>
+              <a:t>9/23/26</a:t>
             </a:fld>
             <a:endParaRPr lang="en-US"/>
           </a:p>
@@ -1252,7 +1252,7 @@
           <a:p>
             <a:fld id="{F238F5BA-0AAF-5142-B69C-F1241056CF61}" type="datetimeFigureOut">
               <a:rPr lang="en-US" smtClean="0"/>
-              <a:t>9/21/26</a:t>
+              <a:t>9/23/26</a:t>
             </a:fld>
             <a:endParaRPr lang="en-US"/>
           </a:p>
@@ -1520,7 +1520,7 @@
           <a:p>
             <a:fld id="{F238F5BA-0AAF-5142-B69C-F1241056CF61}" type="datetimeFigureOut">
               <a:rPr lang="en-US" smtClean="0"/>
-              <a:t>9/21/26</a:t>
+              <a:t>9/23/26</a:t>
             </a:fld>
             <a:endParaRPr lang="en-US"/>
           </a:p>
@@ -1936,7 +1936,7 @@
           <a:p>
             <a:fld id="{F238F5BA-0AAF-5142-B69C-F1241056CF61}" type="datetimeFigureOut">
               <a:rPr lang="en-US" smtClean="0"/>
-              <a:t>9/21/26</a:t>
+              <a:t>9/23/26</a:t>
             </a:fld>
             <a:endParaRPr lang="en-US"/>
           </a:p>
@@ -2085,7 +2085,7 @@
           <a:p>
             <a:fld id="{F238F5BA-0AAF-5142-B69C-F1241056CF61}" type="datetimeFigureOut">
               <a:rPr lang="en-US" smtClean="0"/>
-              <a:t>9/21/26</a:t>
+              <a:t>9/23/26</a:t>
             </a:fld>
             <a:endParaRPr lang="en-US"/>
           </a:p>
@@ -2211,7 +2211,7 @@
           <a:p>
             <a:fld id="{F238F5BA-0AAF-5142-B69C-F1241056CF61}" type="datetimeFigureOut">
               <a:rPr lang="en-US" smtClean="0"/>
-              <a:t>9/21/26</a:t>
+              <a:t>9/23/26</a:t>
             </a:fld>
             <a:endParaRPr lang="en-US"/>
           </a:p>
@@ -2462,7 +2462,7 @@
           <a:p>
             <a:fld id="{F238F5BA-0AAF-5142-B69C-F1241056CF61}" type="datetimeFigureOut">
               <a:rPr lang="en-US" smtClean="0"/>
-              <a:t>9/21/26</a:t>
+              <a:t>9/23/26</a:t>
             </a:fld>
             <a:endParaRPr lang="en-US"/>
           </a:p>
@@ -2907,7 +2907,7 @@
           <a:p>
             <a:fld id="{F238F5BA-0AAF-5142-B69C-F1241056CF61}" type="datetimeFigureOut">
               <a:rPr lang="en-US" smtClean="0"/>
-              <a:t>9/21/26</a:t>
+              <a:t>9/23/26</a:t>
             </a:fld>
             <a:endParaRPr lang="en-US"/>
           </a:p>
@@ -3241,7 +3241,7 @@
           <a:p>
             <a:fld id="{F238F5BA-0AAF-5142-B69C-F1241056CF61}" type="datetimeFigureOut">
               <a:rPr lang="en-US" smtClean="0"/>
-              <a:t>9/21/26</a:t>
+              <a:t>9/23/26</a:t>
             </a:fld>
             <a:endParaRPr lang="en-US"/>
           </a:p>
@@ -3771,7 +3771,12 @@
             <p:ph idx="1"/>
           </p:nvPr>
         </p:nvSpPr>
-        <p:spPr/>
+        <p:spPr>
+          <a:xfrm>
+            <a:off x="1451579" y="2015732"/>
+            <a:ext cx="9603275" cy="4037749"/>
+          </a:xfrm>
+        </p:spPr>
         <p:txBody>
           <a:bodyPr/>
           <a:lstStyle/>
@@ -3785,7 +3790,7 @@
             <a:pPr lvl="1"/>
             <a:r>
               <a:rPr lang="en-US" dirty="0"/>
-              <a:t>Color (chapter 4). </a:t>
+              <a:t>Color (chapter 4 in text). </a:t>
             </a:r>
           </a:p>
           <a:p>
@@ -3829,6 +3834,17 @@
               <a:rPr lang="en-US" dirty="0"/>
               <a:t>If lots of time, we’ll look at Gestalt’s Principles. </a:t>
             </a:r>
+          </a:p>
+          <a:p>
+            <a:r>
+              <a:rPr lang="en-US" dirty="0"/>
+              <a:t>Ask questions if you have anything that is not </a:t>
+            </a:r>
+            <a:r>
+              <a:rPr lang="en-US"/>
+              <a:t>clear for assignment. </a:t>
+            </a:r>
+            <a:endParaRPr lang="en-US" dirty="0"/>
           </a:p>
         </p:txBody>
       </p:sp>
